--- a/宣道詩/(宣道詩148)耶穌珍寶.pptx
+++ b/宣道詩/(宣道詩148)耶穌珍寶.pptx
@@ -305,7 +305,7 @@
           <a:p>
             <a:fld id="{1F8AB0EF-A8FE-4F00-9107-1ABDA1E8633B}" type="datetimeFigureOut">
               <a:rPr lang="vi-VN" smtClean="0"/>
-              <a:t>06/11/2021</a:t>
+              <a:t>13/02/2026</a:t>
             </a:fld>
             <a:endParaRPr lang="vi-VN"/>
           </a:p>
@@ -475,7 +475,7 @@
           <a:p>
             <a:fld id="{1F8AB0EF-A8FE-4F00-9107-1ABDA1E8633B}" type="datetimeFigureOut">
               <a:rPr lang="vi-VN" smtClean="0"/>
-              <a:t>06/11/2021</a:t>
+              <a:t>13/02/2026</a:t>
             </a:fld>
             <a:endParaRPr lang="vi-VN"/>
           </a:p>
@@ -655,7 +655,7 @@
           <a:p>
             <a:fld id="{1F8AB0EF-A8FE-4F00-9107-1ABDA1E8633B}" type="datetimeFigureOut">
               <a:rPr lang="vi-VN" smtClean="0"/>
-              <a:t>06/11/2021</a:t>
+              <a:t>13/02/2026</a:t>
             </a:fld>
             <a:endParaRPr lang="vi-VN"/>
           </a:p>
@@ -825,7 +825,7 @@
           <a:p>
             <a:fld id="{1F8AB0EF-A8FE-4F00-9107-1ABDA1E8633B}" type="datetimeFigureOut">
               <a:rPr lang="vi-VN" smtClean="0"/>
-              <a:t>06/11/2021</a:t>
+              <a:t>13/02/2026</a:t>
             </a:fld>
             <a:endParaRPr lang="vi-VN"/>
           </a:p>
@@ -1071,7 +1071,7 @@
           <a:p>
             <a:fld id="{1F8AB0EF-A8FE-4F00-9107-1ABDA1E8633B}" type="datetimeFigureOut">
               <a:rPr lang="vi-VN" smtClean="0"/>
-              <a:t>06/11/2021</a:t>
+              <a:t>13/02/2026</a:t>
             </a:fld>
             <a:endParaRPr lang="vi-VN"/>
           </a:p>
@@ -1359,7 +1359,7 @@
           <a:p>
             <a:fld id="{1F8AB0EF-A8FE-4F00-9107-1ABDA1E8633B}" type="datetimeFigureOut">
               <a:rPr lang="vi-VN" smtClean="0"/>
-              <a:t>06/11/2021</a:t>
+              <a:t>13/02/2026</a:t>
             </a:fld>
             <a:endParaRPr lang="vi-VN"/>
           </a:p>
@@ -1781,7 +1781,7 @@
           <a:p>
             <a:fld id="{1F8AB0EF-A8FE-4F00-9107-1ABDA1E8633B}" type="datetimeFigureOut">
               <a:rPr lang="vi-VN" smtClean="0"/>
-              <a:t>06/11/2021</a:t>
+              <a:t>13/02/2026</a:t>
             </a:fld>
             <a:endParaRPr lang="vi-VN"/>
           </a:p>
@@ -1899,7 +1899,7 @@
           <a:p>
             <a:fld id="{1F8AB0EF-A8FE-4F00-9107-1ABDA1E8633B}" type="datetimeFigureOut">
               <a:rPr lang="vi-VN" smtClean="0"/>
-              <a:t>06/11/2021</a:t>
+              <a:t>13/02/2026</a:t>
             </a:fld>
             <a:endParaRPr lang="vi-VN"/>
           </a:p>
@@ -1994,7 +1994,7 @@
           <a:p>
             <a:fld id="{1F8AB0EF-A8FE-4F00-9107-1ABDA1E8633B}" type="datetimeFigureOut">
               <a:rPr lang="vi-VN" smtClean="0"/>
-              <a:t>06/11/2021</a:t>
+              <a:t>13/02/2026</a:t>
             </a:fld>
             <a:endParaRPr lang="vi-VN"/>
           </a:p>
@@ -2271,7 +2271,7 @@
           <a:p>
             <a:fld id="{1F8AB0EF-A8FE-4F00-9107-1ABDA1E8633B}" type="datetimeFigureOut">
               <a:rPr lang="vi-VN" smtClean="0"/>
-              <a:t>06/11/2021</a:t>
+              <a:t>13/02/2026</a:t>
             </a:fld>
             <a:endParaRPr lang="vi-VN"/>
           </a:p>
@@ -2528,7 +2528,7 @@
           <a:p>
             <a:fld id="{1F8AB0EF-A8FE-4F00-9107-1ABDA1E8633B}" type="datetimeFigureOut">
               <a:rPr lang="vi-VN" smtClean="0"/>
-              <a:t>06/11/2021</a:t>
+              <a:t>13/02/2026</a:t>
             </a:fld>
             <a:endParaRPr lang="vi-VN"/>
           </a:p>
@@ -2746,7 +2746,7 @@
           <a:p>
             <a:fld id="{1F8AB0EF-A8FE-4F00-9107-1ABDA1E8633B}" type="datetimeFigureOut">
               <a:rPr lang="vi-VN" smtClean="0"/>
-              <a:t>06/11/2021</a:t>
+              <a:t>13/02/2026</a:t>
             </a:fld>
             <a:endParaRPr lang="vi-VN"/>
           </a:p>
@@ -3225,24 +3225,7 @@
                 <a:latin typeface="微軟正黑體" pitchFamily="34" charset="-120"/>
                 <a:ea typeface="微軟正黑體" pitchFamily="34" charset="-120"/>
               </a:rPr>
-              <a:t>耶</a:t>
-            </a:r>
-            <a:r>
-              <a:rPr lang="zh-CN" altLang="en-US" sz="8000" b="1" dirty="0">
-                <a:solidFill>
-                  <a:srgbClr val="000066"/>
-                </a:solidFill>
-                <a:effectLst>
-                  <a:outerShdw blurRad="38100" dist="38100" dir="2700000" algn="tl">
-                    <a:srgbClr val="000000">
-                      <a:alpha val="43137"/>
-                    </a:srgbClr>
-                  </a:outerShdw>
-                </a:effectLst>
-                <a:latin typeface="微軟正黑體" pitchFamily="34" charset="-120"/>
-                <a:ea typeface="微軟正黑體" pitchFamily="34" charset="-120"/>
-              </a:rPr>
-              <a:t>穌珍寶</a:t>
+              <a:t>耶穌珍寶</a:t>
             </a:r>
             <a:endParaRPr lang="zh-TW" altLang="en-US" sz="8000" b="1" dirty="0">
               <a:solidFill>
@@ -3389,15 +3372,29 @@
                 <a:solidFill>
                   <a:srgbClr val="000066"/>
                 </a:solidFill>
-                <a:effectLst/>
               </a:rPr>
-              <a:t>( 3 )</a:t>
+              <a:t>( 3</a:t>
+            </a:r>
+            <a:r>
+              <a:rPr lang="en-US" sz="4800" b="1" dirty="0" smtClean="0">
+                <a:solidFill>
+                  <a:srgbClr val="000066"/>
+                </a:solidFill>
+              </a:rPr>
+              <a:t> </a:t>
+            </a:r>
+            <a:r>
+              <a:rPr lang="en-US" sz="4800" b="1" dirty="0">
+                <a:solidFill>
+                  <a:srgbClr val="000066"/>
+                </a:solidFill>
+              </a:rPr>
+              <a:t>/ 3 )</a:t>
             </a:r>
             <a:endParaRPr lang="vi-VN" sz="4800" b="1" dirty="0">
               <a:solidFill>
                 <a:srgbClr val="000066"/>
               </a:solidFill>
-              <a:effectLst/>
             </a:endParaRPr>
           </a:p>
         </p:txBody>
@@ -3533,15 +3530,13 @@
                 <a:solidFill>
                   <a:srgbClr val="000066"/>
                 </a:solidFill>
-                <a:effectLst/>
               </a:rPr>
-              <a:t>( 3 )</a:t>
+              <a:t>( 3 / 3 )</a:t>
             </a:r>
             <a:endParaRPr lang="vi-VN" sz="4800" b="1" dirty="0">
               <a:solidFill>
                 <a:srgbClr val="000066"/>
               </a:solidFill>
-              <a:effectLst/>
             </a:endParaRPr>
           </a:p>
         </p:txBody>
@@ -3616,17 +3611,7 @@
                 <a:latin typeface="Microsoft JhengHei" panose="020B0604030504040204" pitchFamily="34" charset="-120"/>
                 <a:ea typeface="Microsoft JhengHei" panose="020B0604030504040204" pitchFamily="34" charset="-120"/>
               </a:rPr>
-              <a:t>耶穌珍寶如星</a:t>
-            </a:r>
-            <a:r>
-              <a:rPr lang="zh-CN" altLang="en-US" sz="6400" b="1" dirty="0">
-                <a:solidFill>
-                  <a:srgbClr val="000066"/>
-                </a:solidFill>
-                <a:latin typeface="Microsoft JhengHei" panose="020B0604030504040204" pitchFamily="34" charset="-120"/>
-                <a:ea typeface="Microsoft JhengHei" panose="020B0604030504040204" pitchFamily="34" charset="-120"/>
-              </a:rPr>
-              <a:t>星</a:t>
+              <a:t>耶穌珍寶如星星</a:t>
             </a:r>
             <a:endParaRPr lang="en-US" altLang="zh-CN" sz="6400" b="1" dirty="0">
               <a:solidFill>
@@ -3730,27 +3715,7 @@
                 <a:latin typeface="Microsoft JhengHei" panose="020B0604030504040204" pitchFamily="34" charset="-120"/>
                 <a:ea typeface="Microsoft JhengHei" panose="020B0604030504040204" pitchFamily="34" charset="-120"/>
               </a:rPr>
-              <a:t>都</a:t>
-            </a:r>
-            <a:r>
-              <a:rPr lang="zh-CN" altLang="en-US" sz="6400" b="1" dirty="0">
-                <a:solidFill>
-                  <a:srgbClr val="000066"/>
-                </a:solidFill>
-                <a:latin typeface="Microsoft JhengHei" panose="020B0604030504040204" pitchFamily="34" charset="-120"/>
-                <a:ea typeface="Microsoft JhengHei" panose="020B0604030504040204" pitchFamily="34" charset="-120"/>
-              </a:rPr>
-              <a:t>在天堂的安</a:t>
-            </a:r>
-            <a:r>
-              <a:rPr lang="zh-CN" altLang="en-US" sz="6400" b="1" dirty="0">
-                <a:solidFill>
-                  <a:srgbClr val="000066"/>
-                </a:solidFill>
-                <a:latin typeface="Microsoft JhengHei" panose="020B0604030504040204" pitchFamily="34" charset="-120"/>
-                <a:ea typeface="Microsoft JhengHei" panose="020B0604030504040204" pitchFamily="34" charset="-120"/>
-              </a:rPr>
-              <a:t>寧</a:t>
+              <a:t>都在天堂的安寧</a:t>
             </a:r>
             <a:endParaRPr lang="en-US" altLang="zh-CN" sz="6400" b="1" dirty="0">
               <a:solidFill>
@@ -3855,18 +3820,7 @@
                 <a:latin typeface="Microsoft JhengHei" pitchFamily="34" charset="-120"/>
                 <a:ea typeface="Microsoft JhengHei" pitchFamily="34" charset="-120"/>
               </a:rPr>
-              <a:t>等</a:t>
-            </a:r>
-            <a:r>
-              <a:rPr lang="zh-CN" altLang="en-US" sz="6400" b="1" dirty="0">
-                <a:solidFill>
-                  <a:srgbClr val="000066"/>
-                </a:solidFill>
-                <a:effectLst/>
-                <a:latin typeface="Microsoft JhengHei" pitchFamily="34" charset="-120"/>
-                <a:ea typeface="Microsoft JhengHei" pitchFamily="34" charset="-120"/>
-              </a:rPr>
-              <a:t>主回來  快要回來</a:t>
+              <a:t>等主回來  快要回來</a:t>
             </a:r>
             <a:endParaRPr lang="en-US" altLang="zh-CN" sz="6400" b="1" dirty="0">
               <a:solidFill>
@@ -3933,7 +3887,25 @@
                 </a:solidFill>
                 <a:effectLst/>
               </a:rPr>
-              <a:t>( 1 )</a:t>
+              <a:t>( </a:t>
+            </a:r>
+            <a:r>
+              <a:rPr lang="en-US" sz="4800" b="1" dirty="0" smtClean="0">
+                <a:solidFill>
+                  <a:srgbClr val="000066"/>
+                </a:solidFill>
+                <a:effectLst/>
+              </a:rPr>
+              <a:t>1 / 3 </a:t>
+            </a:r>
+            <a:r>
+              <a:rPr lang="en-US" sz="4800" b="1" dirty="0">
+                <a:solidFill>
+                  <a:srgbClr val="000066"/>
+                </a:solidFill>
+                <a:effectLst/>
+              </a:rPr>
+              <a:t>)</a:t>
             </a:r>
             <a:endParaRPr lang="vi-VN" sz="4800" b="1" dirty="0">
               <a:solidFill>
@@ -4075,15 +4047,13 @@
                 <a:solidFill>
                   <a:srgbClr val="000066"/>
                 </a:solidFill>
-                <a:effectLst/>
               </a:rPr>
-              <a:t>( 1 )</a:t>
+              <a:t>( 1 / 3 )</a:t>
             </a:r>
             <a:endParaRPr lang="vi-VN" sz="4800" b="1" dirty="0">
               <a:solidFill>
                 <a:srgbClr val="000066"/>
               </a:solidFill>
-              <a:effectLst/>
             </a:endParaRPr>
           </a:p>
         </p:txBody>
@@ -4158,17 +4128,7 @@
                 <a:latin typeface="Microsoft JhengHei" panose="020B0604030504040204" pitchFamily="34" charset="-120"/>
                 <a:ea typeface="Microsoft JhengHei" panose="020B0604030504040204" pitchFamily="34" charset="-120"/>
               </a:rPr>
-              <a:t>耶穌珍寶如星</a:t>
-            </a:r>
-            <a:r>
-              <a:rPr lang="zh-CN" altLang="en-US" sz="6400" b="1" dirty="0">
-                <a:solidFill>
-                  <a:srgbClr val="000066"/>
-                </a:solidFill>
-                <a:latin typeface="Microsoft JhengHei" panose="020B0604030504040204" pitchFamily="34" charset="-120"/>
-                <a:ea typeface="Microsoft JhengHei" panose="020B0604030504040204" pitchFamily="34" charset="-120"/>
-              </a:rPr>
-              <a:t>星</a:t>
+              <a:t>耶穌珍寶如星星</a:t>
             </a:r>
             <a:endParaRPr lang="en-US" altLang="zh-CN" sz="6400" b="1" dirty="0">
               <a:solidFill>
@@ -4272,27 +4232,7 @@
                 <a:latin typeface="Microsoft JhengHei" panose="020B0604030504040204" pitchFamily="34" charset="-120"/>
                 <a:ea typeface="Microsoft JhengHei" panose="020B0604030504040204" pitchFamily="34" charset="-120"/>
               </a:rPr>
-              <a:t>都</a:t>
-            </a:r>
-            <a:r>
-              <a:rPr lang="zh-CN" altLang="en-US" sz="6400" b="1" dirty="0">
-                <a:solidFill>
-                  <a:srgbClr val="000066"/>
-                </a:solidFill>
-                <a:latin typeface="Microsoft JhengHei" panose="020B0604030504040204" pitchFamily="34" charset="-120"/>
-                <a:ea typeface="Microsoft JhengHei" panose="020B0604030504040204" pitchFamily="34" charset="-120"/>
-              </a:rPr>
-              <a:t>在天堂的安</a:t>
-            </a:r>
-            <a:r>
-              <a:rPr lang="zh-CN" altLang="en-US" sz="6400" b="1" dirty="0">
-                <a:solidFill>
-                  <a:srgbClr val="000066"/>
-                </a:solidFill>
-                <a:latin typeface="Microsoft JhengHei" panose="020B0604030504040204" pitchFamily="34" charset="-120"/>
-                <a:ea typeface="Microsoft JhengHei" panose="020B0604030504040204" pitchFamily="34" charset="-120"/>
-              </a:rPr>
-              <a:t>寧</a:t>
+              <a:t>都在天堂的安寧</a:t>
             </a:r>
             <a:endParaRPr lang="en-US" altLang="zh-CN" sz="6400" b="1" dirty="0">
               <a:solidFill>
@@ -4454,15 +4394,29 @@
                 <a:solidFill>
                   <a:srgbClr val="000066"/>
                 </a:solidFill>
-                <a:effectLst/>
               </a:rPr>
-              <a:t>( 2 )</a:t>
+              <a:t>( </a:t>
+            </a:r>
+            <a:r>
+              <a:rPr lang="en-US" sz="4800" b="1" dirty="0" smtClean="0">
+                <a:solidFill>
+                  <a:srgbClr val="000066"/>
+                </a:solidFill>
+              </a:rPr>
+              <a:t>2 </a:t>
+            </a:r>
+            <a:r>
+              <a:rPr lang="en-US" sz="4800" b="1" dirty="0">
+                <a:solidFill>
+                  <a:srgbClr val="000066"/>
+                </a:solidFill>
+              </a:rPr>
+              <a:t>/ 3 )</a:t>
             </a:r>
             <a:endParaRPr lang="vi-VN" sz="4800" b="1" dirty="0">
               <a:solidFill>
                 <a:srgbClr val="000066"/>
               </a:solidFill>
-              <a:effectLst/>
             </a:endParaRPr>
           </a:p>
         </p:txBody>
@@ -4598,15 +4552,13 @@
                 <a:solidFill>
                   <a:srgbClr val="000066"/>
                 </a:solidFill>
-                <a:effectLst/>
               </a:rPr>
-              <a:t>( 2 )</a:t>
+              <a:t>( 2 / 3 )</a:t>
             </a:r>
             <a:endParaRPr lang="vi-VN" sz="4800" b="1" dirty="0">
               <a:solidFill>
                 <a:srgbClr val="000066"/>
               </a:solidFill>
-              <a:effectLst/>
             </a:endParaRPr>
           </a:p>
         </p:txBody>
@@ -4681,17 +4633,7 @@
                 <a:latin typeface="Microsoft JhengHei" panose="020B0604030504040204" pitchFamily="34" charset="-120"/>
                 <a:ea typeface="Microsoft JhengHei" panose="020B0604030504040204" pitchFamily="34" charset="-120"/>
               </a:rPr>
-              <a:t>耶穌珍寶如星</a:t>
-            </a:r>
-            <a:r>
-              <a:rPr lang="zh-CN" altLang="en-US" sz="6400" b="1" dirty="0">
-                <a:solidFill>
-                  <a:srgbClr val="000066"/>
-                </a:solidFill>
-                <a:latin typeface="Microsoft JhengHei" panose="020B0604030504040204" pitchFamily="34" charset="-120"/>
-                <a:ea typeface="Microsoft JhengHei" panose="020B0604030504040204" pitchFamily="34" charset="-120"/>
-              </a:rPr>
-              <a:t>星</a:t>
+              <a:t>耶穌珍寶如星星</a:t>
             </a:r>
             <a:endParaRPr lang="en-US" altLang="zh-CN" sz="6400" b="1" dirty="0">
               <a:solidFill>
@@ -4795,27 +4737,7 @@
                 <a:latin typeface="Microsoft JhengHei" panose="020B0604030504040204" pitchFamily="34" charset="-120"/>
                 <a:ea typeface="Microsoft JhengHei" panose="020B0604030504040204" pitchFamily="34" charset="-120"/>
               </a:rPr>
-              <a:t>都</a:t>
-            </a:r>
-            <a:r>
-              <a:rPr lang="zh-CN" altLang="en-US" sz="6400" b="1" dirty="0">
-                <a:solidFill>
-                  <a:srgbClr val="000066"/>
-                </a:solidFill>
-                <a:latin typeface="Microsoft JhengHei" panose="020B0604030504040204" pitchFamily="34" charset="-120"/>
-                <a:ea typeface="Microsoft JhengHei" panose="020B0604030504040204" pitchFamily="34" charset="-120"/>
-              </a:rPr>
-              <a:t>在天堂的安</a:t>
-            </a:r>
-            <a:r>
-              <a:rPr lang="zh-CN" altLang="en-US" sz="6400" b="1" dirty="0">
-                <a:solidFill>
-                  <a:srgbClr val="000066"/>
-                </a:solidFill>
-                <a:latin typeface="Microsoft JhengHei" panose="020B0604030504040204" pitchFamily="34" charset="-120"/>
-                <a:ea typeface="Microsoft JhengHei" panose="020B0604030504040204" pitchFamily="34" charset="-120"/>
-              </a:rPr>
-              <a:t>寧</a:t>
+              <a:t>都在天堂的安寧</a:t>
             </a:r>
             <a:endParaRPr lang="en-US" altLang="zh-CN" sz="6400" b="1" dirty="0">
               <a:solidFill>
